--- a/inbox/Application Aware Networking/Vol_IX_Book_04_FedAAN_Teams_Telephony_Catalog.pptx
+++ b/inbox/Application Aware Networking/Vol_IX_Book_04_FedAAN_Teams_Telephony_Catalog.pptx
@@ -729,13 +729,13 @@
           <a:lstStyle/>
           <a:p>
             <a:r>
-              <a:t>Make the reuse explicit: Teams is an M365 workload, so its secure-baseline drift folds into the existing M365 loop rather than a bespoke one. The SCuBA baseline reference is the canon SCuBA spec (UIAO_002). CISA SCuBA / BOD 25-01.</a:t>
+              <a:t>Make the reuse explicit: Teams is an M365 workload, so its secure-baseline drift folds into the existing M365 loop rather than a bespoke one. The SCuBA baseline reference is the canon SCuBA spec. CISA SCuBA / BOD 25-01.</a:t>
             </a:r>
           </a:p>
           <a:p/>
           <a:p>
             <a:r>
-              <a:t>Vendor sources: https://www.cisa.gov/scuba | uiao repo: src/uiao/canon/UIAO_002_SCuBA_Technical_Specification_v1.0.md</a:t>
+              <a:t>Vendor sources: https://www.cisa.gov/scuba</a:t>
             </a:r>
           </a:p>
         </p:txBody>
@@ -4646,7 +4646,7 @@
                 </a:solidFill>
                 <a:latin typeface="Arial"/>
               </a:rPr>
-              <a:t>Date Code: 2026-07-12 15:00 ET</a:t>
+              <a:t>Date Code: 2026-07-14 11:56 ET</a:t>
             </a:r>
           </a:p>
         </p:txBody>
@@ -4834,7 +4834,7 @@
                 </a:solidFill>
                 <a:latin typeface="Arial"/>
               </a:rPr>
-              <a:t>Teams Telephony Catalog &amp; Teams SCuBA Drift · Date Code: 2026-07-12 15:00 ET</a:t>
+              <a:t>Teams Telephony Catalog &amp; Teams SCuBA Drift · Date Code: 2026-07-14 11:56 ET</a:t>
             </a:r>
           </a:p>
         </p:txBody>
@@ -5057,7 +5057,7 @@
                 </a:solidFill>
                 <a:latin typeface="Arial"/>
               </a:rPr>
-              <a:t>Teams Telephony Catalog &amp; Teams SCuBA Drift · Date Code: 2026-07-12 15:00 ET</a:t>
+              <a:t>Teams Telephony Catalog &amp; Teams SCuBA Drift · Date Code: 2026-07-14 11:56 ET</a:t>
             </a:r>
           </a:p>
         </p:txBody>
@@ -5964,7 +5964,7 @@
                 </a:solidFill>
                 <a:latin typeface="Arial"/>
               </a:rPr>
-              <a:t>Teams Telephony Catalog &amp; Teams SCuBA Drift · Date Code: 2026-07-12 15:00 ET</a:t>
+              <a:t>Teams Telephony Catalog &amp; Teams SCuBA Drift · Date Code: 2026-07-14 11:56 ET</a:t>
             </a:r>
           </a:p>
         </p:txBody>
@@ -6865,7 +6865,7 @@
                 </a:solidFill>
                 <a:latin typeface="Arial"/>
               </a:rPr>
-              <a:t>Teams Telephony Catalog &amp; Teams SCuBA Drift · Date Code: 2026-07-12 15:00 ET</a:t>
+              <a:t>Teams Telephony Catalog &amp; Teams SCuBA Drift · Date Code: 2026-07-14 11:56 ET</a:t>
             </a:r>
           </a:p>
         </p:txBody>
@@ -7387,7 +7387,7 @@
                 </a:solidFill>
                 <a:latin typeface="Arial"/>
               </a:rPr>
-              <a:t>Teams Telephony Catalog &amp; Teams SCuBA Drift · Date Code: 2026-07-12 15:00 ET</a:t>
+              <a:t>Teams Telephony Catalog &amp; Teams SCuBA Drift · Date Code: 2026-07-14 11:56 ET</a:t>
             </a:r>
           </a:p>
         </p:txBody>
